--- a/courses/z2005/00-oop-then-algorithms/lecture-4.pptx
+++ b/courses/z2005/00-oop-then-algorithms/lecture-4.pptx
@@ -14,6 +14,10 @@
     <p:sldId id="262" r:id="rId8"/>
     <p:sldId id="263" r:id="rId9"/>
     <p:sldId id="264" r:id="rId10"/>
+    <p:sldId id="265" r:id="rId11"/>
+    <p:sldId id="266" r:id="rId12"/>
+    <p:sldId id="267" r:id="rId13"/>
+    <p:sldId id="268" r:id="rId14"/>
   </p:sldIdLst>
   <p:sldSz cx="9144000" cy="5143500" type="screen16x9"/>
   <p:notesSz cx="6858000" cy="9144000"/>
@@ -3123,7 +3127,7 @@
             </a:pPr>
             <a:r>
               <a:rPr/>
-              <a:t>Data Structures as Classes, and Why We Count Operations</a:t>
+              <a:t>Big-O: Why We Count Operations, Not Seconds</a:t>
             </a:r>
           </a:p>
         </p:txBody>
@@ -3160,6 +3164,224 @@
             <a:r>
               <a:rPr/>
               <a:t>Dr. Innocent Nyalala</a:t>
+            </a:r>
+          </a:p>
+        </p:txBody>
+      </p:sp>
+    </p:spTree>
+  </p:cSld>
+</p:sld>
+</file>
+
+<file path=ppt/slides/slide10.xml><?xml version="1.0" encoding="utf-8"?>
+<p:sld xmlns:a="http://schemas.openxmlformats.org/drawingml/2006/main" xmlns:r="http://schemas.openxmlformats.org/officeDocument/2006/relationships" xmlns:p="http://schemas.openxmlformats.org/presentationml/2006/main">
+  <p:cSld>
+    <p:spTree>
+      <p:nvGrpSpPr>
+        <p:cNvPr id="1" name=""/>
+        <p:cNvGrpSpPr/>
+        <p:nvPr/>
+      </p:nvGrpSpPr>
+      <p:grpSpPr>
+        <a:xfrm>
+          <a:off x="0" y="0"/>
+          <a:ext cx="0" cy="0"/>
+          <a:chOff x="0" y="0"/>
+          <a:chExt cx="0" cy="0"/>
+        </a:xfrm>
+      </p:grpSpPr>
+      <p:sp>
+        <p:nvSpPr>
+          <p:cNvPr id="2" name="Title 1"/>
+          <p:cNvSpPr>
+            <a:spLocks noGrp="1"/>
+          </p:cNvSpPr>
+          <p:nvPr>
+            <p:ph type="title"/>
+          </p:nvPr>
+        </p:nvSpPr>
+        <p:spPr/>
+        <p:txBody>
+          <a:bodyPr/>
+          <a:lstStyle/>
+          <a:p>
+            <a:pPr lvl="0" indent="0" marL="0">
+              <a:buNone/>
+            </a:pPr>
+            <a:r>
+              <a:rPr/>
+              <a:t>The chart that makes it visual</a:t>
+            </a:r>
+          </a:p>
+        </p:txBody>
+      </p:sp>
+      <p:pic>
+        <p:nvPicPr>
+          <p:cNvPr descr="figures/growth-rates.svg" id="0" name="Picture 1"/>
+          <p:cNvPicPr>
+            <a:picLocks noGrp="1" noChangeAspect="1"/>
+          </p:cNvPicPr>
+          <p:nvPr/>
+        </p:nvPicPr>
+        <p:blipFill>
+          <a:blip r:embed="rId2"/>
+          <a:stretch>
+            <a:fillRect/>
+          </a:stretch>
+        </p:blipFill>
+        <p:spPr bwMode="auto">
+          <a:xfrm>
+            <a:off x="965200" y="1193800"/>
+            <a:ext cx="7200900" cy="3390900"/>
+          </a:xfrm>
+          <a:prstGeom prst="rect">
+            <a:avLst/>
+          </a:prstGeom>
+          <a:noFill/>
+          <a:ln w="9525">
+            <a:noFill/>
+            <a:headEnd/>
+            <a:tailEnd/>
+          </a:ln>
+        </p:spPr>
+      </p:pic>
+    </p:spTree>
+  </p:cSld>
+</p:sld>
+</file>
+
+<file path=ppt/slides/slide11.xml><?xml version="1.0" encoding="utf-8"?>
+<p:sld xmlns:a="http://schemas.openxmlformats.org/drawingml/2006/main" xmlns:r="http://schemas.openxmlformats.org/officeDocument/2006/relationships" xmlns:p="http://schemas.openxmlformats.org/presentationml/2006/main">
+  <p:cSld>
+    <p:spTree>
+      <p:nvGrpSpPr>
+        <p:cNvPr id="1" name=""/>
+        <p:cNvGrpSpPr/>
+        <p:nvPr/>
+      </p:nvGrpSpPr>
+      <p:grpSpPr>
+        <a:xfrm>
+          <a:off x="0" y="0"/>
+          <a:ext cx="0" cy="0"/>
+          <a:chOff x="0" y="0"/>
+          <a:chExt cx="0" cy="0"/>
+        </a:xfrm>
+      </p:grpSpPr>
+      <p:sp>
+        <p:nvSpPr>
+          <p:cNvPr id="2" name="Title 1"/>
+          <p:cNvSpPr>
+            <a:spLocks noGrp="1"/>
+          </p:cNvSpPr>
+          <p:nvPr>
+            <p:ph type="title"/>
+          </p:nvPr>
+        </p:nvSpPr>
+        <p:spPr/>
+        <p:txBody>
+          <a:bodyPr/>
+          <a:lstStyle/>
+          <a:p>
+            <a:pPr lvl="0" indent="0" marL="0">
+              <a:buNone/>
+            </a:pPr>
+            <a:r>
+              <a:rPr/>
+              <a:t>Quiz — classify these, right now</a:t>
+            </a:r>
+          </a:p>
+        </p:txBody>
+      </p:sp>
+    </p:spTree>
+  </p:cSld>
+</p:sld>
+</file>
+
+<file path=ppt/slides/slide12.xml><?xml version="1.0" encoding="utf-8"?>
+<p:sld xmlns:a="http://schemas.openxmlformats.org/drawingml/2006/main" xmlns:r="http://schemas.openxmlformats.org/officeDocument/2006/relationships" xmlns:p="http://schemas.openxmlformats.org/presentationml/2006/main">
+  <p:cSld>
+    <p:spTree>
+      <p:nvGrpSpPr>
+        <p:cNvPr id="1" name=""/>
+        <p:cNvGrpSpPr/>
+        <p:nvPr/>
+      </p:nvGrpSpPr>
+      <p:grpSpPr>
+        <a:xfrm>
+          <a:off x="0" y="0"/>
+          <a:ext cx="0" cy="0"/>
+          <a:chOff x="0" y="0"/>
+          <a:chExt cx="0" cy="0"/>
+        </a:xfrm>
+      </p:grpSpPr>
+      <p:sp>
+        <p:nvSpPr>
+          <p:cNvPr id="2" name="Title 1"/>
+          <p:cNvSpPr>
+            <a:spLocks noGrp="1"/>
+          </p:cNvSpPr>
+          <p:nvPr>
+            <p:ph type="title"/>
+          </p:nvPr>
+        </p:nvSpPr>
+        <p:spPr/>
+        <p:txBody>
+          <a:bodyPr/>
+          <a:lstStyle/>
+          <a:p>
+            <a:pPr lvl="0" indent="0" marL="0">
+              <a:buNone/>
+            </a:pPr>
+            <a:r>
+              <a:rPr/>
+              <a:t>Quiz — answers</a:t>
+            </a:r>
+          </a:p>
+        </p:txBody>
+      </p:sp>
+    </p:spTree>
+  </p:cSld>
+</p:sld>
+</file>
+
+<file path=ppt/slides/slide13.xml><?xml version="1.0" encoding="utf-8"?>
+<p:sld xmlns:a="http://schemas.openxmlformats.org/drawingml/2006/main" xmlns:r="http://schemas.openxmlformats.org/officeDocument/2006/relationships" xmlns:p="http://schemas.openxmlformats.org/presentationml/2006/main">
+  <p:cSld>
+    <p:spTree>
+      <p:nvGrpSpPr>
+        <p:cNvPr id="1" name=""/>
+        <p:cNvGrpSpPr/>
+        <p:nvPr/>
+      </p:nvGrpSpPr>
+      <p:grpSpPr>
+        <a:xfrm>
+          <a:off x="0" y="0"/>
+          <a:ext cx="0" cy="0"/>
+          <a:chOff x="0" y="0"/>
+          <a:chExt cx="0" cy="0"/>
+        </a:xfrm>
+      </p:grpSpPr>
+      <p:sp>
+        <p:nvSpPr>
+          <p:cNvPr id="2" name="Title 1"/>
+          <p:cNvSpPr>
+            <a:spLocks noGrp="1"/>
+          </p:cNvSpPr>
+          <p:nvPr>
+            <p:ph type="title"/>
+          </p:nvPr>
+        </p:nvSpPr>
+        <p:spPr/>
+        <p:txBody>
+          <a:bodyPr/>
+          <a:lstStyle/>
+          <a:p>
+            <a:pPr lvl="0" indent="0" marL="0">
+              <a:buNone/>
+            </a:pPr>
+            <a:r>
+              <a:rPr/>
+              <a:t>Summary</a:t>
             </a:r>
           </a:p>
         </p:txBody>
@@ -3206,425 +3428,7 @@
             </a:pPr>
             <a:r>
               <a:rPr/>
-              <a:t>From Shape to Stack</a:t>
-            </a:r>
-          </a:p>
-        </p:txBody>
-      </p:sp>
-      <p:sp>
-        <p:nvSpPr>
-          <p:cNvPr id="3" name="Content Placeholder 2"/>
-          <p:cNvSpPr>
-            <a:spLocks noGrp="1"/>
-          </p:cNvSpPr>
-          <p:nvPr>
-            <p:ph idx="1"/>
-          </p:nvPr>
-        </p:nvSpPr>
-        <p:spPr/>
-        <p:txBody>
-          <a:bodyPr/>
-          <a:lstStyle/>
-          <a:p>
-            <a:pPr lvl="0" indent="0">
-              <a:buNone/>
-            </a:pPr>
-            <a:r>
-              <a:rPr b="1">
-                <a:solidFill>
-                  <a:srgbClr val="007020"/>
-                </a:solidFill>
-                <a:latin typeface="Courier"/>
-              </a:rPr>
-              <a:t>class</a:t>
-            </a:r>
-            <a:r>
-              <a:rPr>
-                <a:latin typeface="Courier"/>
-              </a:rPr>
-              <a:t> Stack:</a:t>
-            </a:r>
-            <a:br/>
-            <a:r>
-              <a:rPr>
-                <a:latin typeface="Courier"/>
-              </a:rPr>
-              <a:t>    </a:t>
-            </a:r>
-            <a:r>
-              <a:rPr i="1">
-                <a:solidFill>
-                  <a:srgbClr val="60A0B0"/>
-                </a:solidFill>
-                <a:latin typeface="Courier"/>
-              </a:rPr>
-              <a:t>"""Last-in, first-out collection."""</a:t>
-            </a:r>
-            <a:br/>
-            <a:br/>
-            <a:r>
-              <a:rPr>
-                <a:latin typeface="Courier"/>
-              </a:rPr>
-              <a:t>    </a:t>
-            </a:r>
-            <a:r>
-              <a:rPr b="1">
-                <a:solidFill>
-                  <a:srgbClr val="007020"/>
-                </a:solidFill>
-                <a:latin typeface="Courier"/>
-              </a:rPr>
-              <a:t>def</a:t>
-            </a:r>
-            <a:r>
-              <a:rPr>
-                <a:latin typeface="Courier"/>
-              </a:rPr>
-              <a:t> </a:t>
-            </a:r>
-            <a:r>
-              <a:rPr>
-                <a:solidFill>
-                  <a:srgbClr val="06287E"/>
-                </a:solidFill>
-                <a:latin typeface="Courier"/>
-              </a:rPr>
-              <a:t>__init__</a:t>
-            </a:r>
-            <a:r>
-              <a:rPr>
-                <a:latin typeface="Courier"/>
-              </a:rPr>
-              <a:t>(</a:t>
-            </a:r>
-            <a:r>
-              <a:rPr>
-                <a:solidFill>
-                  <a:srgbClr val="19177C"/>
-                </a:solidFill>
-                <a:latin typeface="Courier"/>
-              </a:rPr>
-              <a:t>self</a:t>
-            </a:r>
-            <a:r>
-              <a:rPr>
-                <a:latin typeface="Courier"/>
-              </a:rPr>
-              <a:t>):</a:t>
-            </a:r>
-            <a:br/>
-            <a:r>
-              <a:rPr>
-                <a:latin typeface="Courier"/>
-              </a:rPr>
-              <a:t>        </a:t>
-            </a:r>
-            <a:r>
-              <a:rPr>
-                <a:solidFill>
-                  <a:srgbClr val="19177C"/>
-                </a:solidFill>
-                <a:latin typeface="Courier"/>
-              </a:rPr>
-              <a:t>self</a:t>
-            </a:r>
-            <a:r>
-              <a:rPr>
-                <a:latin typeface="Courier"/>
-              </a:rPr>
-              <a:t>._items </a:t>
-            </a:r>
-            <a:r>
-              <a:rPr>
-                <a:solidFill>
-                  <a:srgbClr val="666666"/>
-                </a:solidFill>
-                <a:latin typeface="Courier"/>
-              </a:rPr>
-              <a:t>=</a:t>
-            </a:r>
-            <a:r>
-              <a:rPr>
-                <a:latin typeface="Courier"/>
-              </a:rPr>
-              <a:t> []          </a:t>
-            </a:r>
-            <a:r>
-              <a:rPr i="1">
-                <a:solidFill>
-                  <a:srgbClr val="60A0B0"/>
-                </a:solidFill>
-                <a:latin typeface="Courier"/>
-              </a:rPr>
-              <a:t># hidden: nothing outside touches this list directly</a:t>
-            </a:r>
-            <a:br/>
-            <a:br/>
-            <a:r>
-              <a:rPr>
-                <a:latin typeface="Courier"/>
-              </a:rPr>
-              <a:t>    </a:t>
-            </a:r>
-            <a:r>
-              <a:rPr b="1">
-                <a:solidFill>
-                  <a:srgbClr val="007020"/>
-                </a:solidFill>
-                <a:latin typeface="Courier"/>
-              </a:rPr>
-              <a:t>def</a:t>
-            </a:r>
-            <a:r>
-              <a:rPr>
-                <a:latin typeface="Courier"/>
-              </a:rPr>
-              <a:t> push(</a:t>
-            </a:r>
-            <a:r>
-              <a:rPr>
-                <a:solidFill>
-                  <a:srgbClr val="19177C"/>
-                </a:solidFill>
-                <a:latin typeface="Courier"/>
-              </a:rPr>
-              <a:t>self</a:t>
-            </a:r>
-            <a:r>
-              <a:rPr>
-                <a:latin typeface="Courier"/>
-              </a:rPr>
-              <a:t>, item):</a:t>
-            </a:r>
-            <a:br/>
-            <a:r>
-              <a:rPr>
-                <a:latin typeface="Courier"/>
-              </a:rPr>
-              <a:t>        </a:t>
-            </a:r>
-            <a:r>
-              <a:rPr>
-                <a:solidFill>
-                  <a:srgbClr val="19177C"/>
-                </a:solidFill>
-                <a:latin typeface="Courier"/>
-              </a:rPr>
-              <a:t>self</a:t>
-            </a:r>
-            <a:r>
-              <a:rPr>
-                <a:latin typeface="Courier"/>
-              </a:rPr>
-              <a:t>._items.append(item)  </a:t>
-            </a:r>
-            <a:r>
-              <a:rPr i="1">
-                <a:solidFill>
-                  <a:srgbClr val="60A0B0"/>
-                </a:solidFill>
-                <a:latin typeface="Courier"/>
-              </a:rPr>
-              <a:t># add to the end</a:t>
-            </a:r>
-            <a:br/>
-            <a:br/>
-            <a:r>
-              <a:rPr>
-                <a:latin typeface="Courier"/>
-              </a:rPr>
-              <a:t>    </a:t>
-            </a:r>
-            <a:r>
-              <a:rPr b="1">
-                <a:solidFill>
-                  <a:srgbClr val="007020"/>
-                </a:solidFill>
-                <a:latin typeface="Courier"/>
-              </a:rPr>
-              <a:t>def</a:t>
-            </a:r>
-            <a:r>
-              <a:rPr>
-                <a:latin typeface="Courier"/>
-              </a:rPr>
-              <a:t> pop(</a:t>
-            </a:r>
-            <a:r>
-              <a:rPr>
-                <a:solidFill>
-                  <a:srgbClr val="19177C"/>
-                </a:solidFill>
-                <a:latin typeface="Courier"/>
-              </a:rPr>
-              <a:t>self</a:t>
-            </a:r>
-            <a:r>
-              <a:rPr>
-                <a:latin typeface="Courier"/>
-              </a:rPr>
-              <a:t>):</a:t>
-            </a:r>
-            <a:br/>
-            <a:r>
-              <a:rPr>
-                <a:latin typeface="Courier"/>
-              </a:rPr>
-              <a:t>        </a:t>
-            </a:r>
-            <a:r>
-              <a:rPr b="1">
-                <a:solidFill>
-                  <a:srgbClr val="007020"/>
-                </a:solidFill>
-                <a:latin typeface="Courier"/>
-              </a:rPr>
-              <a:t>return</a:t>
-            </a:r>
-            <a:r>
-              <a:rPr>
-                <a:latin typeface="Courier"/>
-              </a:rPr>
-              <a:t> </a:t>
-            </a:r>
-            <a:r>
-              <a:rPr>
-                <a:solidFill>
-                  <a:srgbClr val="19177C"/>
-                </a:solidFill>
-                <a:latin typeface="Courier"/>
-              </a:rPr>
-              <a:t>self</a:t>
-            </a:r>
-            <a:r>
-              <a:rPr>
-                <a:latin typeface="Courier"/>
-              </a:rPr>
-              <a:t>._items.pop()  </a:t>
-            </a:r>
-            <a:r>
-              <a:rPr i="1">
-                <a:solidFill>
-                  <a:srgbClr val="60A0B0"/>
-                </a:solidFill>
-                <a:latin typeface="Courier"/>
-              </a:rPr>
-              <a:t># remove and return from the end</a:t>
-            </a:r>
-            <a:br/>
-            <a:br/>
-            <a:r>
-              <a:rPr>
-                <a:latin typeface="Courier"/>
-              </a:rPr>
-              <a:t>    </a:t>
-            </a:r>
-            <a:r>
-              <a:rPr b="1">
-                <a:solidFill>
-                  <a:srgbClr val="007020"/>
-                </a:solidFill>
-                <a:latin typeface="Courier"/>
-              </a:rPr>
-              <a:t>def</a:t>
-            </a:r>
-            <a:r>
-              <a:rPr>
-                <a:latin typeface="Courier"/>
-              </a:rPr>
-              <a:t> is_empty(</a:t>
-            </a:r>
-            <a:r>
-              <a:rPr>
-                <a:solidFill>
-                  <a:srgbClr val="19177C"/>
-                </a:solidFill>
-                <a:latin typeface="Courier"/>
-              </a:rPr>
-              <a:t>self</a:t>
-            </a:r>
-            <a:r>
-              <a:rPr>
-                <a:latin typeface="Courier"/>
-              </a:rPr>
-              <a:t>):</a:t>
-            </a:r>
-            <a:br/>
-            <a:r>
-              <a:rPr>
-                <a:latin typeface="Courier"/>
-              </a:rPr>
-              <a:t>        </a:t>
-            </a:r>
-            <a:r>
-              <a:rPr b="1">
-                <a:solidFill>
-                  <a:srgbClr val="007020"/>
-                </a:solidFill>
-                <a:latin typeface="Courier"/>
-              </a:rPr>
-              <a:t>return</a:t>
-            </a:r>
-            <a:r>
-              <a:rPr>
-                <a:latin typeface="Courier"/>
-              </a:rPr>
-              <a:t> </a:t>
-            </a:r>
-            <a:r>
-              <a:rPr>
-                <a:solidFill>
-                  <a:srgbClr val="008000"/>
-                </a:solidFill>
-                <a:latin typeface="Courier"/>
-              </a:rPr>
-              <a:t>len</a:t>
-            </a:r>
-            <a:r>
-              <a:rPr>
-                <a:latin typeface="Courier"/>
-              </a:rPr>
-              <a:t>(</a:t>
-            </a:r>
-            <a:r>
-              <a:rPr>
-                <a:solidFill>
-                  <a:srgbClr val="19177C"/>
-                </a:solidFill>
-                <a:latin typeface="Courier"/>
-              </a:rPr>
-              <a:t>self</a:t>
-            </a:r>
-            <a:r>
-              <a:rPr>
-                <a:latin typeface="Courier"/>
-              </a:rPr>
-              <a:t>._items) </a:t>
-            </a:r>
-            <a:r>
-              <a:rPr>
-                <a:solidFill>
-                  <a:srgbClr val="666666"/>
-                </a:solidFill>
-                <a:latin typeface="Courier"/>
-              </a:rPr>
-              <a:t>==</a:t>
-            </a:r>
-            <a:r>
-              <a:rPr>
-                <a:latin typeface="Courier"/>
-              </a:rPr>
-              <a:t> </a:t>
-            </a:r>
-            <a:r>
-              <a:rPr>
-                <a:solidFill>
-                  <a:srgbClr val="40A070"/>
-                </a:solidFill>
-                <a:latin typeface="Courier"/>
-              </a:rPr>
-              <a:t>0</a:t>
+              <a:t>Objectives</a:t>
             </a:r>
           </a:p>
         </p:txBody>
@@ -3671,143 +3475,7 @@
             </a:pPr>
             <a:r>
               <a:rPr/>
-              <a:t>Tracing it</a:t>
-            </a:r>
-          </a:p>
-        </p:txBody>
-      </p:sp>
-      <p:sp>
-        <p:nvSpPr>
-          <p:cNvPr id="3" name="Content Placeholder 2"/>
-          <p:cNvSpPr>
-            <a:spLocks noGrp="1"/>
-          </p:cNvSpPr>
-          <p:nvPr>
-            <p:ph idx="1"/>
-          </p:nvPr>
-        </p:nvSpPr>
-        <p:spPr/>
-        <p:txBody>
-          <a:bodyPr/>
-          <a:lstStyle/>
-          <a:p>
-            <a:pPr lvl="0" indent="0">
-              <a:buNone/>
-            </a:pPr>
-            <a:r>
-              <a:rPr>
-                <a:latin typeface="Courier"/>
-              </a:rPr>
-              <a:t>s </a:t>
-            </a:r>
-            <a:r>
-              <a:rPr>
-                <a:solidFill>
-                  <a:srgbClr val="666666"/>
-                </a:solidFill>
-                <a:latin typeface="Courier"/>
-              </a:rPr>
-              <a:t>=</a:t>
-            </a:r>
-            <a:r>
-              <a:rPr>
-                <a:latin typeface="Courier"/>
-              </a:rPr>
-              <a:t> Stack()</a:t>
-            </a:r>
-            <a:br/>
-            <a:r>
-              <a:rPr>
-                <a:latin typeface="Courier"/>
-              </a:rPr>
-              <a:t>s.push(</a:t>
-            </a:r>
-            <a:r>
-              <a:rPr>
-                <a:solidFill>
-                  <a:srgbClr val="40A070"/>
-                </a:solidFill>
-                <a:latin typeface="Courier"/>
-              </a:rPr>
-              <a:t>1</a:t>
-            </a:r>
-            <a:r>
-              <a:rPr>
-                <a:latin typeface="Courier"/>
-              </a:rPr>
-              <a:t>)</a:t>
-            </a:r>
-            <a:br/>
-            <a:r>
-              <a:rPr>
-                <a:latin typeface="Courier"/>
-              </a:rPr>
-              <a:t>s.push(</a:t>
-            </a:r>
-            <a:r>
-              <a:rPr>
-                <a:solidFill>
-                  <a:srgbClr val="40A070"/>
-                </a:solidFill>
-                <a:latin typeface="Courier"/>
-              </a:rPr>
-              <a:t>2</a:t>
-            </a:r>
-            <a:r>
-              <a:rPr>
-                <a:latin typeface="Courier"/>
-              </a:rPr>
-              <a:t>)</a:t>
-            </a:r>
-            <a:br/>
-            <a:r>
-              <a:rPr>
-                <a:solidFill>
-                  <a:srgbClr val="008000"/>
-                </a:solidFill>
-                <a:latin typeface="Courier"/>
-              </a:rPr>
-              <a:t>print</a:t>
-            </a:r>
-            <a:r>
-              <a:rPr>
-                <a:latin typeface="Courier"/>
-              </a:rPr>
-              <a:t>(s.pop())        </a:t>
-            </a:r>
-            <a:r>
-              <a:rPr i="1">
-                <a:solidFill>
-                  <a:srgbClr val="60A0B0"/>
-                </a:solidFill>
-                <a:latin typeface="Courier"/>
-              </a:rPr>
-              <a:t># 2 — the most recently pushed item comes back first</a:t>
-            </a:r>
-            <a:br/>
-            <a:r>
-              <a:rPr>
-                <a:solidFill>
-                  <a:srgbClr val="008000"/>
-                </a:solidFill>
-                <a:latin typeface="Courier"/>
-              </a:rPr>
-              <a:t>print</a:t>
-            </a:r>
-            <a:r>
-              <a:rPr>
-                <a:latin typeface="Courier"/>
-              </a:rPr>
-              <a:t>(s.is_empty())   </a:t>
-            </a:r>
-            <a:r>
-              <a:rPr i="1">
-                <a:solidFill>
-                  <a:srgbClr val="60A0B0"/>
-                </a:solidFill>
-                <a:latin typeface="Courier"/>
-              </a:rPr>
-              <a:t># False — one item, "1", is still inside</a:t>
+              <a:t>Outline</a:t>
             </a:r>
           </a:p>
         </p:txBody>
@@ -3854,7 +3522,7 @@
             </a:pPr>
             <a:r>
               <a:rPr/>
-              <a:t>Why “counting operations,” not “using a stopwatch”</a:t>
+              <a:t>The problem: finding a contact</a:t>
             </a:r>
           </a:p>
         </p:txBody>
@@ -3878,19 +3546,94 @@
               <a:buNone/>
             </a:pPr>
             <a:r>
-              <a:rPr b="1">
-                <a:solidFill>
-                  <a:srgbClr val="008000"/>
-                </a:solidFill>
-                <a:latin typeface="Courier"/>
-              </a:rPr>
-              <a:t>import</a:t>
-            </a:r>
-            <a:r>
-              <a:rPr>
-                <a:latin typeface="Courier"/>
-              </a:rPr>
-              <a:t> time</a:t>
+              <a:rPr>
+                <a:latin typeface="Courier"/>
+              </a:rPr>
+              <a:t>contacts </a:t>
+            </a:r>
+            <a:r>
+              <a:rPr>
+                <a:solidFill>
+                  <a:srgbClr val="666666"/>
+                </a:solidFill>
+                <a:latin typeface="Courier"/>
+              </a:rPr>
+              <a:t>=</a:t>
+            </a:r>
+            <a:r>
+              <a:rPr>
+                <a:latin typeface="Courier"/>
+              </a:rPr>
+              <a:t> [</a:t>
+            </a:r>
+            <a:r>
+              <a:rPr>
+                <a:solidFill>
+                  <a:srgbClr val="4070A0"/>
+                </a:solidFill>
+                <a:latin typeface="Courier"/>
+              </a:rPr>
+              <a:t>"Zara"</a:t>
+            </a:r>
+            <a:r>
+              <a:rPr>
+                <a:latin typeface="Courier"/>
+              </a:rPr>
+              <a:t>, </a:t>
+            </a:r>
+            <a:r>
+              <a:rPr>
+                <a:solidFill>
+                  <a:srgbClr val="4070A0"/>
+                </a:solidFill>
+                <a:latin typeface="Courier"/>
+              </a:rPr>
+              <a:t>"Amina"</a:t>
+            </a:r>
+            <a:r>
+              <a:rPr>
+                <a:latin typeface="Courier"/>
+              </a:rPr>
+              <a:t>, </a:t>
+            </a:r>
+            <a:r>
+              <a:rPr>
+                <a:solidFill>
+                  <a:srgbClr val="4070A0"/>
+                </a:solidFill>
+                <a:latin typeface="Courier"/>
+              </a:rPr>
+              <a:t>"John"</a:t>
+            </a:r>
+            <a:r>
+              <a:rPr>
+                <a:latin typeface="Courier"/>
+              </a:rPr>
+              <a:t>, </a:t>
+            </a:r>
+            <a:r>
+              <a:rPr>
+                <a:solidFill>
+                  <a:srgbClr val="4070A0"/>
+                </a:solidFill>
+                <a:latin typeface="Courier"/>
+              </a:rPr>
+              <a:t>"Priya"</a:t>
+            </a:r>
+            <a:r>
+              <a:rPr>
+                <a:latin typeface="Courier"/>
+              </a:rPr>
+              <a:t>, ...]  </a:t>
+            </a:r>
+            <a:r>
+              <a:rPr i="1">
+                <a:solidFill>
+                  <a:srgbClr val="60A0B0"/>
+                </a:solidFill>
+                <a:latin typeface="Courier"/>
+              </a:rPr>
+              <a:t># 1,000 names, unsorted</a:t>
             </a:r>
             <a:br/>
             <a:br/>
@@ -3907,7 +3650,7 @@
               <a:rPr>
                 <a:latin typeface="Courier"/>
               </a:rPr>
-              <a:t> linear_search(items, target):</a:t>
+              <a:t> find_linear(contacts, name):</a:t>
             </a:r>
             <a:br/>
             <a:r>
@@ -3929,7 +3672,7 @@
               <a:rPr>
                 <a:latin typeface="Courier"/>
               </a:rPr>
-              <a:t> i, x </a:t>
+              <a:t> i, c </a:t>
             </a:r>
             <a:r>
               <a:rPr b="1">
@@ -3959,7 +3702,7 @@
               <a:rPr>
                 <a:latin typeface="Courier"/>
               </a:rPr>
-              <a:t>(items):</a:t>
+              <a:t>(contacts):</a:t>
             </a:r>
             <a:br/>
             <a:r>
@@ -3981,7 +3724,7 @@
               <a:rPr>
                 <a:latin typeface="Courier"/>
               </a:rPr>
-              <a:t> x </a:t>
+              <a:t> c </a:t>
             </a:r>
             <a:r>
               <a:rPr>
@@ -3996,7 +3739,7 @@
               <a:rPr>
                 <a:latin typeface="Courier"/>
               </a:rPr>
-              <a:t> target:</a:t>
+              <a:t> name:</a:t>
             </a:r>
             <a:br/>
             <a:r>
@@ -4059,149 +3802,6 @@
                 <a:latin typeface="Courier"/>
               </a:rPr>
               <a:t>1</a:t>
-            </a:r>
-            <a:br/>
-            <a:br/>
-            <a:r>
-              <a:rPr>
-                <a:latin typeface="Courier"/>
-              </a:rPr>
-              <a:t>data </a:t>
-            </a:r>
-            <a:r>
-              <a:rPr>
-                <a:solidFill>
-                  <a:srgbClr val="666666"/>
-                </a:solidFill>
-                <a:latin typeface="Courier"/>
-              </a:rPr>
-              <a:t>=</a:t>
-            </a:r>
-            <a:r>
-              <a:rPr>
-                <a:latin typeface="Courier"/>
-              </a:rPr>
-              <a:t> </a:t>
-            </a:r>
-            <a:r>
-              <a:rPr>
-                <a:solidFill>
-                  <a:srgbClr val="008000"/>
-                </a:solidFill>
-                <a:latin typeface="Courier"/>
-              </a:rPr>
-              <a:t>list</a:t>
-            </a:r>
-            <a:r>
-              <a:rPr>
-                <a:latin typeface="Courier"/>
-              </a:rPr>
-              <a:t>(</a:t>
-            </a:r>
-            <a:r>
-              <a:rPr>
-                <a:solidFill>
-                  <a:srgbClr val="008000"/>
-                </a:solidFill>
-                <a:latin typeface="Courier"/>
-              </a:rPr>
-              <a:t>range</a:t>
-            </a:r>
-            <a:r>
-              <a:rPr>
-                <a:latin typeface="Courier"/>
-              </a:rPr>
-              <a:t>(</a:t>
-            </a:r>
-            <a:r>
-              <a:rPr>
-                <a:solidFill>
-                  <a:srgbClr val="40A070"/>
-                </a:solidFill>
-                <a:latin typeface="Courier"/>
-              </a:rPr>
-              <a:t>1_000_000</a:t>
-            </a:r>
-            <a:r>
-              <a:rPr>
-                <a:latin typeface="Courier"/>
-              </a:rPr>
-              <a:t>))</a:t>
-            </a:r>
-            <a:br/>
-            <a:r>
-              <a:rPr>
-                <a:latin typeface="Courier"/>
-              </a:rPr>
-              <a:t>start </a:t>
-            </a:r>
-            <a:r>
-              <a:rPr>
-                <a:solidFill>
-                  <a:srgbClr val="666666"/>
-                </a:solidFill>
-                <a:latin typeface="Courier"/>
-              </a:rPr>
-              <a:t>=</a:t>
-            </a:r>
-            <a:r>
-              <a:rPr>
-                <a:latin typeface="Courier"/>
-              </a:rPr>
-              <a:t> time.perf_counter()</a:t>
-            </a:r>
-            <a:br/>
-            <a:r>
-              <a:rPr>
-                <a:latin typeface="Courier"/>
-              </a:rPr>
-              <a:t>linear_search(data, </a:t>
-            </a:r>
-            <a:r>
-              <a:rPr>
-                <a:solidFill>
-                  <a:srgbClr val="40A070"/>
-                </a:solidFill>
-                <a:latin typeface="Courier"/>
-              </a:rPr>
-              <a:t>999_999</a:t>
-            </a:r>
-            <a:r>
-              <a:rPr>
-                <a:latin typeface="Courier"/>
-              </a:rPr>
-              <a:t>)</a:t>
-            </a:r>
-            <a:br/>
-            <a:r>
-              <a:rPr>
-                <a:solidFill>
-                  <a:srgbClr val="008000"/>
-                </a:solidFill>
-                <a:latin typeface="Courier"/>
-              </a:rPr>
-              <a:t>print</a:t>
-            </a:r>
-            <a:r>
-              <a:rPr>
-                <a:latin typeface="Courier"/>
-              </a:rPr>
-              <a:t>(time.perf_counter() </a:t>
-            </a:r>
-            <a:r>
-              <a:rPr>
-                <a:solidFill>
-                  <a:srgbClr val="666666"/>
-                </a:solidFill>
-                <a:latin typeface="Courier"/>
-              </a:rPr>
-              <a:t>-</a:t>
-            </a:r>
-            <a:r>
-              <a:rPr>
-                <a:latin typeface="Courier"/>
-              </a:rPr>
-              <a:t> start)</a:t>
             </a:r>
           </a:p>
         </p:txBody>
@@ -4248,175 +3848,693 @@
             </a:pPr>
             <a:r>
               <a:rPr/>
-              <a:t>What actually stays true across machines</a:t>
-            </a:r>
-          </a:p>
-        </p:txBody>
-      </p:sp>
-      <p:graphicFrame>
-        <p:nvGraphicFramePr>
-          <p:cNvPr id="6" name="Content Placeholder 5"/>
-          <p:cNvGraphicFramePr>
-            <a:graphicFrameLocks noGrp="1"/>
-          </p:cNvGraphicFramePr>
+              <a:t>Class 1 — O(1): the speed-dial slot</a:t>
+            </a:r>
+          </a:p>
+        </p:txBody>
+      </p:sp>
+      <p:sp>
+        <p:nvSpPr>
+          <p:cNvPr id="3" name="Content Placeholder 2"/>
+          <p:cNvSpPr>
+            <a:spLocks noGrp="1"/>
+          </p:cNvSpPr>
           <p:nvPr>
             <p:ph idx="1"/>
           </p:nvPr>
-        </p:nvGraphicFramePr>
-        <p:xfrm>
-          <a:off x="457200" y="1193800"/>
-          <a:ext cx="8229600" cy="3390900"/>
-        </p:xfrm>
-        <a:graphic>
-          <a:graphicData uri="http://schemas.openxmlformats.org/drawingml/2006/table">
-            <a:tbl>
-              <a:tblPr firstRow="1" bandRow="1">
-                <a:tableStyleId>{5C22544A-7EE6-4342-B048-85BDC9FD1C3A}</a:tableStyleId>
-              </a:tblPr>
-              <a:tblGrid>
-                <a:gridCol w="4114800"/>
-                <a:gridCol w="4114800"/>
-              </a:tblGrid>
-              <a:tr h="0">
-                <a:tc>
-                  <a:txBody>
-                    <a:bodyPr/>
-                    <a:lstStyle/>
-                    <a:p>
-                      <a:pPr lvl="0" indent="0" marL="0">
-                        <a:buNone/>
-                      </a:pPr>
-                      <a:r>
-                        <a:rPr/>
-                        <a:t>Input size</a:t>
-                      </a:r>
-                    </a:p>
-                  </a:txBody>
-                  <a:tcPr/>
-                </a:tc>
-                <a:tc>
-                  <a:txBody>
-                    <a:bodyPr/>
-                    <a:lstStyle/>
-                    <a:p>
-                      <a:pPr lvl="0" indent="0" marL="0">
-                        <a:buNone/>
-                      </a:pPr>
-                      <a:r>
-                        <a:rPr/>
-                        <a:t>Comparisons (worst case)</a:t>
-                      </a:r>
-                    </a:p>
-                  </a:txBody>
-                  <a:tcPr/>
-                </a:tc>
-              </a:tr>
-              <a:tr h="0">
-                <a:tc>
-                  <a:txBody>
-                    <a:bodyPr/>
-                    <a:lstStyle/>
-                    <a:p>
-                      <a:pPr lvl="0" indent="0" marL="0">
-                        <a:buNone/>
-                      </a:pPr>
-                      <a:r>
-                        <a:rPr/>
-                        <a:t>1,000</a:t>
-                      </a:r>
-                    </a:p>
-                  </a:txBody>
-                </a:tc>
-                <a:tc>
-                  <a:txBody>
-                    <a:bodyPr/>
-                    <a:lstStyle/>
-                    <a:p>
-                      <a:pPr lvl="0" indent="0" marL="0">
-                        <a:buNone/>
-                      </a:pPr>
-                      <a:r>
-                        <a:rPr/>
-                        <a:t>1,000</a:t>
-                      </a:r>
-                    </a:p>
-                  </a:txBody>
-                </a:tc>
-              </a:tr>
-              <a:tr h="0">
-                <a:tc>
-                  <a:txBody>
-                    <a:bodyPr/>
-                    <a:lstStyle/>
-                    <a:p>
-                      <a:pPr lvl="0" indent="0" marL="0">
-                        <a:buNone/>
-                      </a:pPr>
-                      <a:r>
-                        <a:rPr/>
-                        <a:t>1,000,000</a:t>
-                      </a:r>
-                    </a:p>
-                  </a:txBody>
-                </a:tc>
-                <a:tc>
-                  <a:txBody>
-                    <a:bodyPr/>
-                    <a:lstStyle/>
-                    <a:p>
-                      <a:pPr lvl="0" indent="0" marL="0">
-                        <a:buNone/>
-                      </a:pPr>
-                      <a:r>
-                        <a:rPr/>
-                        <a:t>1,000,000</a:t>
-                      </a:r>
-                    </a:p>
-                  </a:txBody>
-                </a:tc>
-              </a:tr>
-              <a:tr h="0">
-                <a:tc>
-                  <a:txBody>
-                    <a:bodyPr/>
-                    <a:lstStyle/>
-                    <a:p>
-                      <a:pPr lvl="0" indent="0" marL="0">
-                        <a:buNone/>
-                      </a:pPr>
-                      <a:r>
-                        <a:rPr/>
-                        <a:t>1,000,000,000</a:t>
-                      </a:r>
-                    </a:p>
-                  </a:txBody>
-                </a:tc>
-                <a:tc>
-                  <a:txBody>
-                    <a:bodyPr/>
-                    <a:lstStyle/>
-                    <a:p>
-                      <a:pPr lvl="0" indent="0" marL="0">
-                        <a:buNone/>
-                      </a:pPr>
-                      <a:r>
-                        <a:rPr/>
-                        <a:t>1,000,000,000</a:t>
-                      </a:r>
-                    </a:p>
-                  </a:txBody>
-                </a:tc>
-              </a:tr>
-            </a:tbl>
-          </a:graphicData>
-        </a:graphic>
-      </p:graphicFrame>
+        </p:nvSpPr>
+        <p:spPr/>
+        <p:txBody>
+          <a:bodyPr/>
+          <a:lstStyle/>
+          <a:p>
+            <a:pPr lvl="0" indent="0">
+              <a:buNone/>
+            </a:pPr>
+            <a:r>
+              <a:rPr>
+                <a:latin typeface="Courier"/>
+              </a:rPr>
+              <a:t>speed_dial </a:t>
+            </a:r>
+            <a:r>
+              <a:rPr>
+                <a:solidFill>
+                  <a:srgbClr val="666666"/>
+                </a:solidFill>
+                <a:latin typeface="Courier"/>
+              </a:rPr>
+              <a:t>=</a:t>
+            </a:r>
+            <a:r>
+              <a:rPr>
+                <a:latin typeface="Courier"/>
+              </a:rPr>
+              <a:t> {</a:t>
+            </a:r>
+            <a:r>
+              <a:rPr>
+                <a:solidFill>
+                  <a:srgbClr val="40A070"/>
+                </a:solidFill>
+                <a:latin typeface="Courier"/>
+              </a:rPr>
+              <a:t>1</a:t>
+            </a:r>
+            <a:r>
+              <a:rPr>
+                <a:latin typeface="Courier"/>
+              </a:rPr>
+              <a:t>: </a:t>
+            </a:r>
+            <a:r>
+              <a:rPr>
+                <a:solidFill>
+                  <a:srgbClr val="4070A0"/>
+                </a:solidFill>
+                <a:latin typeface="Courier"/>
+              </a:rPr>
+              <a:t>"Mum"</a:t>
+            </a:r>
+            <a:r>
+              <a:rPr>
+                <a:latin typeface="Courier"/>
+              </a:rPr>
+              <a:t>, </a:t>
+            </a:r>
+            <a:r>
+              <a:rPr>
+                <a:solidFill>
+                  <a:srgbClr val="40A070"/>
+                </a:solidFill>
+                <a:latin typeface="Courier"/>
+              </a:rPr>
+              <a:t>2</a:t>
+            </a:r>
+            <a:r>
+              <a:rPr>
+                <a:latin typeface="Courier"/>
+              </a:rPr>
+              <a:t>: </a:t>
+            </a:r>
+            <a:r>
+              <a:rPr>
+                <a:solidFill>
+                  <a:srgbClr val="4070A0"/>
+                </a:solidFill>
+                <a:latin typeface="Courier"/>
+              </a:rPr>
+              <a:t>"Amina"</a:t>
+            </a:r>
+            <a:r>
+              <a:rPr>
+                <a:latin typeface="Courier"/>
+              </a:rPr>
+              <a:t>, </a:t>
+            </a:r>
+            <a:r>
+              <a:rPr>
+                <a:solidFill>
+                  <a:srgbClr val="40A070"/>
+                </a:solidFill>
+                <a:latin typeface="Courier"/>
+              </a:rPr>
+              <a:t>3</a:t>
+            </a:r>
+            <a:r>
+              <a:rPr>
+                <a:latin typeface="Courier"/>
+              </a:rPr>
+              <a:t>: </a:t>
+            </a:r>
+            <a:r>
+              <a:rPr>
+                <a:solidFill>
+                  <a:srgbClr val="4070A0"/>
+                </a:solidFill>
+                <a:latin typeface="Courier"/>
+              </a:rPr>
+              <a:t>"Work"</a:t>
+            </a:r>
+            <a:r>
+              <a:rPr>
+                <a:latin typeface="Courier"/>
+              </a:rPr>
+              <a:t>}</a:t>
+            </a:r>
+            <a:br/>
+            <a:r>
+              <a:rPr>
+                <a:solidFill>
+                  <a:srgbClr val="008000"/>
+                </a:solidFill>
+                <a:latin typeface="Courier"/>
+              </a:rPr>
+              <a:t>print</a:t>
+            </a:r>
+            <a:r>
+              <a:rPr>
+                <a:latin typeface="Courier"/>
+              </a:rPr>
+              <a:t>(speed_dial[</a:t>
+            </a:r>
+            <a:r>
+              <a:rPr>
+                <a:solidFill>
+                  <a:srgbClr val="40A070"/>
+                </a:solidFill>
+                <a:latin typeface="Courier"/>
+              </a:rPr>
+              <a:t>2</a:t>
+            </a:r>
+            <a:r>
+              <a:rPr>
+                <a:latin typeface="Courier"/>
+              </a:rPr>
+              <a:t>])   </a:t>
+            </a:r>
+            <a:r>
+              <a:rPr i="1">
+                <a:solidFill>
+                  <a:srgbClr val="60A0B0"/>
+                </a:solidFill>
+                <a:latin typeface="Courier"/>
+              </a:rPr>
+              <a:t># "Amina" — one lookup, regardless of dict size</a:t>
+            </a:r>
+          </a:p>
+        </p:txBody>
+      </p:sp>
     </p:spTree>
   </p:cSld>
 </p:sld>
 </file>
 
-<file path=ppt/slides/slide6.xml><?xml version="1.0" encoding="UTF-8"?><p:sld xmlns:a="http://schemas.openxmlformats.org/drawingml/2006/main" xmlns:r="http://schemas.openxmlformats.org/officeDocument/2006/relationships" xmlns:p="http://schemas.openxmlformats.org/presentationml/2006/main"><p:cSld><p:spTree><p:nvGrpSpPr><p:cNvPr id="1" name="" /><p:cNvGrpSpPr /><p:nvPr /></p:nvGrpSpPr><p:grpSpPr><a:xfrm><a:off x="0" y="0" /><a:ext cx="0" cy="0" /><a:chOff x="0" y="0" /><a:chExt cx="0" cy="0" /></a:xfrm></p:grpSpPr><p:sp><p:nvSpPr><p:cNvPr id="2" name="Title 1" /><p:cNvSpPr><a:spLocks noGrp="1" /></p:cNvSpPr><p:nvPr><p:ph type="title" /></p:nvPr></p:nvSpPr><p:spPr /><p:txBody><a:bodyPr /><a:lstStyle /><a:p><a:pPr lvl="0" indent="0" marL="0"><a:buNone /></a:pPr><a:r><a:rPr /><a:t>Naming the growth rate</a:t></a:r></a:p></p:txBody></p:sp><p:graphicFrame><p:nvGraphicFramePr><p:cNvPr id="6" name="Content Placeholder 5" /><p:cNvGraphicFramePr><a:graphicFrameLocks noGrp="1" /></p:cNvGraphicFramePr><p:nvPr><p:ph idx="1" /></p:nvPr></p:nvGraphicFramePr><p:xfrm><a:off x="457200" y="1193800" /><a:ext cx="8229600" cy="3390900" /></p:xfrm><a:graphic><a:graphicData uri="http://schemas.openxmlformats.org/drawingml/2006/table"><a:tbl><a:tblPr firstRow="1" bandRow="1"><a:tableStyleId>{5C22544A-7EE6-4342-B048-85BDC9FD1C3A}</a:tableStyleId></a:tblPr><a:tblGrid><a:gridCol w="2743200" /><a:gridCol w="2743200" /><a:gridCol w="2743200" /></a:tblGrid><a:tr h="0"><a:tc><a:txBody><a:bodyPr /><a:lstStyle /><a:p><a:pPr lvl="0" indent="0" marL="0"><a:buNone /></a:pPr><a14:m><m:oMath xmlns:m="http://schemas.openxmlformats.org/officeDocument/2006/math"><m:r><m:t>n</m:t></m:r></m:oMath></a14:m></a:p></a:txBody><a:tcPr /></a:tc><a:tc><a:txBody><a:bodyPr /><a:lstStyle /><a:p><a:pPr lvl="0" indent="0" marL="0"><a:buNone /></a:pPr><a14:m><m:oMath xmlns:m="http://schemas.openxmlformats.org/officeDocument/2006/math"><m:r><m:t>O</m:t></m:r><m:r><m:rPr><m:sty m:val="p" /></m:rPr><m:t>(</m:t></m:r><m:r><m:t>n</m:t></m:r><m:r><m:rPr><m:sty m:val="p" /></m:rPr><m:t>)</m:t></m:r></m:oMath></a14:m><a:r><a:rPr /><a:t> linear search</a:t></a:r></a:p></a:txBody><a:tcPr /></a:tc><a:tc><a:txBody><a:bodyPr /><a:lstStyle /><a:p><a:pPr lvl="0" indent="0" marL="0"><a:buNone /></a:pPr><a14:m><m:oMath xmlns:m="http://schemas.openxmlformats.org/officeDocument/2006/math"><m:r><m:t>O</m:t></m:r><m:r><m:rPr><m:sty m:val="p" /></m:rPr><m:t>(</m:t></m:r><m:r><m:rPr><m:sty m:val="p" /></m:rPr><m:t>log</m:t></m:r><m:r><m:t>n</m:t></m:r><m:r><m:rPr><m:sty m:val="p" /></m:rPr><m:t>)</m:t></m:r></m:oMath></a14:m><a:r><a:rPr /><a:t> binary search</a:t></a:r></a:p></a:txBody><a:tcPr /></a:tc></a:tr><a:tr h="0"><a:tc><a:txBody><a:bodyPr /><a:lstStyle /><a:p><a:pPr lvl="0" indent="0" marL="0"><a:buNone /></a:pPr><a:r><a:rPr /><a:t>1,000</a:t></a:r></a:p></a:txBody></a:tc><a:tc><a:txBody><a:bodyPr /><a:lstStyle /><a:p><a:pPr lvl="0" indent="0" marL="0"><a:buNone /></a:pPr><a:r><a:rPr /><a:t>1,000</a:t></a:r></a:p></a:txBody></a:tc><a:tc><a:txBody><a:bodyPr /><a:lstStyle /><a:p><a:pPr lvl="0" indent="0" marL="0"><a:buNone /></a:pPr><a:r><a:rPr /><a:t>~10</a:t></a:r></a:p></a:txBody></a:tc></a:tr><a:tr h="0"><a:tc><a:txBody><a:bodyPr /><a:lstStyle /><a:p><a:pPr lvl="0" indent="0" marL="0"><a:buNone /></a:pPr><a:r><a:rPr /><a:t>1,000,000</a:t></a:r></a:p></a:txBody></a:tc><a:tc><a:txBody><a:bodyPr /><a:lstStyle /><a:p><a:pPr lvl="0" indent="0" marL="0"><a:buNone /></a:pPr><a:r><a:rPr /><a:t>1,000,000</a:t></a:r></a:p></a:txBody></a:tc><a:tc><a:txBody><a:bodyPr /><a:lstStyle /><a:p><a:pPr lvl="0" indent="0" marL="0"><a:buNone /></a:pPr><a:r><a:rPr /><a:t>~20</a:t></a:r></a:p></a:txBody></a:tc></a:tr><a:tr h="0"><a:tc><a:txBody><a:bodyPr /><a:lstStyle /><a:p><a:pPr lvl="0" indent="0" marL="0"><a:buNone /></a:pPr><a:r><a:rPr /><a:t>1,000,000,000</a:t></a:r></a:p></a:txBody></a:tc><a:tc><a:txBody><a:bodyPr /><a:lstStyle /><a:p><a:pPr lvl="0" indent="0" marL="0"><a:buNone /></a:pPr><a:r><a:rPr /><a:t>1,000,000,000</a:t></a:r></a:p></a:txBody></a:tc><a:tc><a:txBody><a:bodyPr /><a:lstStyle /><a:p><a:pPr lvl="0" indent="0" marL="0"><a:buNone /></a:pPr><a:r><a:rPr /><a:t>~30</a:t></a:r></a:p></a:txBody></a:tc></a:tr></a:tbl></a:graphicData></a:graphic></p:graphicFrame></p:spTree></p:cSld></p:sld>
+<file path=ppt/slides/slide6.xml><?xml version="1.0" encoding="utf-8"?>
+<p:sld xmlns:a="http://schemas.openxmlformats.org/drawingml/2006/main" xmlns:r="http://schemas.openxmlformats.org/officeDocument/2006/relationships" xmlns:p="http://schemas.openxmlformats.org/presentationml/2006/main">
+  <p:cSld>
+    <p:spTree>
+      <p:nvGrpSpPr>
+        <p:cNvPr id="1" name=""/>
+        <p:cNvGrpSpPr/>
+        <p:nvPr/>
+      </p:nvGrpSpPr>
+      <p:grpSpPr>
+        <a:xfrm>
+          <a:off x="0" y="0"/>
+          <a:ext cx="0" cy="0"/>
+          <a:chOff x="0" y="0"/>
+          <a:chExt cx="0" cy="0"/>
+        </a:xfrm>
+      </p:grpSpPr>
+      <p:sp>
+        <p:nvSpPr>
+          <p:cNvPr id="2" name="Title 1"/>
+          <p:cNvSpPr>
+            <a:spLocks noGrp="1"/>
+          </p:cNvSpPr>
+          <p:nvPr>
+            <p:ph type="title"/>
+          </p:nvPr>
+        </p:nvSpPr>
+        <p:spPr/>
+        <p:txBody>
+          <a:bodyPr/>
+          <a:lstStyle/>
+          <a:p>
+            <a:pPr lvl="0" indent="0" marL="0">
+              <a:buNone/>
+            </a:pPr>
+            <a:r>
+              <a:rPr/>
+              <a:t>Class 2 — O(log n): the guessing game</a:t>
+            </a:r>
+          </a:p>
+        </p:txBody>
+      </p:sp>
+      <p:sp>
+        <p:nvSpPr>
+          <p:cNvPr id="3" name="Content Placeholder 2"/>
+          <p:cNvSpPr>
+            <a:spLocks noGrp="1"/>
+          </p:cNvSpPr>
+          <p:nvPr>
+            <p:ph idx="1"/>
+          </p:nvPr>
+        </p:nvSpPr>
+        <p:spPr/>
+        <p:txBody>
+          <a:bodyPr/>
+          <a:lstStyle/>
+          <a:p>
+            <a:pPr lvl="0" indent="0">
+              <a:buNone/>
+            </a:pPr>
+            <a:r>
+              <a:rPr b="1">
+                <a:solidFill>
+                  <a:srgbClr val="007020"/>
+                </a:solidFill>
+                <a:latin typeface="Courier"/>
+              </a:rPr>
+              <a:t>def</a:t>
+            </a:r>
+            <a:r>
+              <a:rPr>
+                <a:latin typeface="Courier"/>
+              </a:rPr>
+              <a:t> binary_search(sorted_contacts, name):</a:t>
+            </a:r>
+            <a:br/>
+            <a:r>
+              <a:rPr>
+                <a:latin typeface="Courier"/>
+              </a:rPr>
+              <a:t>    lo, hi </a:t>
+            </a:r>
+            <a:r>
+              <a:rPr>
+                <a:solidFill>
+                  <a:srgbClr val="666666"/>
+                </a:solidFill>
+                <a:latin typeface="Courier"/>
+              </a:rPr>
+              <a:t>=</a:t>
+            </a:r>
+            <a:r>
+              <a:rPr>
+                <a:latin typeface="Courier"/>
+              </a:rPr>
+              <a:t> </a:t>
+            </a:r>
+            <a:r>
+              <a:rPr>
+                <a:solidFill>
+                  <a:srgbClr val="40A070"/>
+                </a:solidFill>
+                <a:latin typeface="Courier"/>
+              </a:rPr>
+              <a:t>0</a:t>
+            </a:r>
+            <a:r>
+              <a:rPr>
+                <a:latin typeface="Courier"/>
+              </a:rPr>
+              <a:t>, </a:t>
+            </a:r>
+            <a:r>
+              <a:rPr>
+                <a:solidFill>
+                  <a:srgbClr val="008000"/>
+                </a:solidFill>
+                <a:latin typeface="Courier"/>
+              </a:rPr>
+              <a:t>len</a:t>
+            </a:r>
+            <a:r>
+              <a:rPr>
+                <a:latin typeface="Courier"/>
+              </a:rPr>
+              <a:t>(sorted_contacts) </a:t>
+            </a:r>
+            <a:r>
+              <a:rPr>
+                <a:solidFill>
+                  <a:srgbClr val="666666"/>
+                </a:solidFill>
+                <a:latin typeface="Courier"/>
+              </a:rPr>
+              <a:t>-</a:t>
+            </a:r>
+            <a:r>
+              <a:rPr>
+                <a:latin typeface="Courier"/>
+              </a:rPr>
+              <a:t> </a:t>
+            </a:r>
+            <a:r>
+              <a:rPr>
+                <a:solidFill>
+                  <a:srgbClr val="40A070"/>
+                </a:solidFill>
+                <a:latin typeface="Courier"/>
+              </a:rPr>
+              <a:t>1</a:t>
+            </a:r>
+            <a:br/>
+            <a:r>
+              <a:rPr>
+                <a:latin typeface="Courier"/>
+              </a:rPr>
+              <a:t>    </a:t>
+            </a:r>
+            <a:r>
+              <a:rPr b="1">
+                <a:solidFill>
+                  <a:srgbClr val="007020"/>
+                </a:solidFill>
+                <a:latin typeface="Courier"/>
+              </a:rPr>
+              <a:t>while</a:t>
+            </a:r>
+            <a:r>
+              <a:rPr>
+                <a:latin typeface="Courier"/>
+              </a:rPr>
+              <a:t> lo </a:t>
+            </a:r>
+            <a:r>
+              <a:rPr>
+                <a:solidFill>
+                  <a:srgbClr val="666666"/>
+                </a:solidFill>
+                <a:latin typeface="Courier"/>
+              </a:rPr>
+              <a:t>&lt;=</a:t>
+            </a:r>
+            <a:r>
+              <a:rPr>
+                <a:latin typeface="Courier"/>
+              </a:rPr>
+              <a:t> hi:</a:t>
+            </a:r>
+            <a:br/>
+            <a:r>
+              <a:rPr>
+                <a:latin typeface="Courier"/>
+              </a:rPr>
+              <a:t>        mid </a:t>
+            </a:r>
+            <a:r>
+              <a:rPr>
+                <a:solidFill>
+                  <a:srgbClr val="666666"/>
+                </a:solidFill>
+                <a:latin typeface="Courier"/>
+              </a:rPr>
+              <a:t>=</a:t>
+            </a:r>
+            <a:r>
+              <a:rPr>
+                <a:latin typeface="Courier"/>
+              </a:rPr>
+              <a:t> (lo </a:t>
+            </a:r>
+            <a:r>
+              <a:rPr>
+                <a:solidFill>
+                  <a:srgbClr val="666666"/>
+                </a:solidFill>
+                <a:latin typeface="Courier"/>
+              </a:rPr>
+              <a:t>+</a:t>
+            </a:r>
+            <a:r>
+              <a:rPr>
+                <a:latin typeface="Courier"/>
+              </a:rPr>
+              <a:t> hi) </a:t>
+            </a:r>
+            <a:r>
+              <a:rPr>
+                <a:solidFill>
+                  <a:srgbClr val="666666"/>
+                </a:solidFill>
+                <a:latin typeface="Courier"/>
+              </a:rPr>
+              <a:t>//</a:t>
+            </a:r>
+            <a:r>
+              <a:rPr>
+                <a:latin typeface="Courier"/>
+              </a:rPr>
+              <a:t> </a:t>
+            </a:r>
+            <a:r>
+              <a:rPr>
+                <a:solidFill>
+                  <a:srgbClr val="40A070"/>
+                </a:solidFill>
+                <a:latin typeface="Courier"/>
+              </a:rPr>
+              <a:t>2</a:t>
+            </a:r>
+            <a:br/>
+            <a:r>
+              <a:rPr>
+                <a:latin typeface="Courier"/>
+              </a:rPr>
+              <a:t>        </a:t>
+            </a:r>
+            <a:r>
+              <a:rPr b="1">
+                <a:solidFill>
+                  <a:srgbClr val="007020"/>
+                </a:solidFill>
+                <a:latin typeface="Courier"/>
+              </a:rPr>
+              <a:t>if</a:t>
+            </a:r>
+            <a:r>
+              <a:rPr>
+                <a:latin typeface="Courier"/>
+              </a:rPr>
+              <a:t> sorted_contacts[mid] </a:t>
+            </a:r>
+            <a:r>
+              <a:rPr>
+                <a:solidFill>
+                  <a:srgbClr val="666666"/>
+                </a:solidFill>
+                <a:latin typeface="Courier"/>
+              </a:rPr>
+              <a:t>==</a:t>
+            </a:r>
+            <a:r>
+              <a:rPr>
+                <a:latin typeface="Courier"/>
+              </a:rPr>
+              <a:t> name:</a:t>
+            </a:r>
+            <a:br/>
+            <a:r>
+              <a:rPr>
+                <a:latin typeface="Courier"/>
+              </a:rPr>
+              <a:t>            </a:t>
+            </a:r>
+            <a:r>
+              <a:rPr b="1">
+                <a:solidFill>
+                  <a:srgbClr val="007020"/>
+                </a:solidFill>
+                <a:latin typeface="Courier"/>
+              </a:rPr>
+              <a:t>return</a:t>
+            </a:r>
+            <a:r>
+              <a:rPr>
+                <a:latin typeface="Courier"/>
+              </a:rPr>
+              <a:t> mid</a:t>
+            </a:r>
+            <a:br/>
+            <a:r>
+              <a:rPr>
+                <a:latin typeface="Courier"/>
+              </a:rPr>
+              <a:t>        </a:t>
+            </a:r>
+            <a:r>
+              <a:rPr b="1">
+                <a:solidFill>
+                  <a:srgbClr val="007020"/>
+                </a:solidFill>
+                <a:latin typeface="Courier"/>
+              </a:rPr>
+              <a:t>elif</a:t>
+            </a:r>
+            <a:r>
+              <a:rPr>
+                <a:latin typeface="Courier"/>
+              </a:rPr>
+              <a:t> sorted_contacts[mid] </a:t>
+            </a:r>
+            <a:r>
+              <a:rPr>
+                <a:solidFill>
+                  <a:srgbClr val="666666"/>
+                </a:solidFill>
+                <a:latin typeface="Courier"/>
+              </a:rPr>
+              <a:t>&lt;</a:t>
+            </a:r>
+            <a:r>
+              <a:rPr>
+                <a:latin typeface="Courier"/>
+              </a:rPr>
+              <a:t> name:</a:t>
+            </a:r>
+            <a:br/>
+            <a:r>
+              <a:rPr>
+                <a:latin typeface="Courier"/>
+              </a:rPr>
+              <a:t>            lo </a:t>
+            </a:r>
+            <a:r>
+              <a:rPr>
+                <a:solidFill>
+                  <a:srgbClr val="666666"/>
+                </a:solidFill>
+                <a:latin typeface="Courier"/>
+              </a:rPr>
+              <a:t>=</a:t>
+            </a:r>
+            <a:r>
+              <a:rPr>
+                <a:latin typeface="Courier"/>
+              </a:rPr>
+              <a:t> mid </a:t>
+            </a:r>
+            <a:r>
+              <a:rPr>
+                <a:solidFill>
+                  <a:srgbClr val="666666"/>
+                </a:solidFill>
+                <a:latin typeface="Courier"/>
+              </a:rPr>
+              <a:t>+</a:t>
+            </a:r>
+            <a:r>
+              <a:rPr>
+                <a:latin typeface="Courier"/>
+              </a:rPr>
+              <a:t> </a:t>
+            </a:r>
+            <a:r>
+              <a:rPr>
+                <a:solidFill>
+                  <a:srgbClr val="40A070"/>
+                </a:solidFill>
+                <a:latin typeface="Courier"/>
+              </a:rPr>
+              <a:t>1</a:t>
+            </a:r>
+            <a:br/>
+            <a:r>
+              <a:rPr>
+                <a:latin typeface="Courier"/>
+              </a:rPr>
+              <a:t>        </a:t>
+            </a:r>
+            <a:r>
+              <a:rPr b="1">
+                <a:solidFill>
+                  <a:srgbClr val="007020"/>
+                </a:solidFill>
+                <a:latin typeface="Courier"/>
+              </a:rPr>
+              <a:t>else</a:t>
+            </a:r>
+            <a:r>
+              <a:rPr>
+                <a:latin typeface="Courier"/>
+              </a:rPr>
+              <a:t>:</a:t>
+            </a:r>
+            <a:br/>
+            <a:r>
+              <a:rPr>
+                <a:latin typeface="Courier"/>
+              </a:rPr>
+              <a:t>            hi </a:t>
+            </a:r>
+            <a:r>
+              <a:rPr>
+                <a:solidFill>
+                  <a:srgbClr val="666666"/>
+                </a:solidFill>
+                <a:latin typeface="Courier"/>
+              </a:rPr>
+              <a:t>=</a:t>
+            </a:r>
+            <a:r>
+              <a:rPr>
+                <a:latin typeface="Courier"/>
+              </a:rPr>
+              <a:t> mid </a:t>
+            </a:r>
+            <a:r>
+              <a:rPr>
+                <a:solidFill>
+                  <a:srgbClr val="666666"/>
+                </a:solidFill>
+                <a:latin typeface="Courier"/>
+              </a:rPr>
+              <a:t>-</a:t>
+            </a:r>
+            <a:r>
+              <a:rPr>
+                <a:latin typeface="Courier"/>
+              </a:rPr>
+              <a:t> </a:t>
+            </a:r>
+            <a:r>
+              <a:rPr>
+                <a:solidFill>
+                  <a:srgbClr val="40A070"/>
+                </a:solidFill>
+                <a:latin typeface="Courier"/>
+              </a:rPr>
+              <a:t>1</a:t>
+            </a:r>
+            <a:br/>
+            <a:r>
+              <a:rPr>
+                <a:latin typeface="Courier"/>
+              </a:rPr>
+              <a:t>    </a:t>
+            </a:r>
+            <a:r>
+              <a:rPr b="1">
+                <a:solidFill>
+                  <a:srgbClr val="007020"/>
+                </a:solidFill>
+                <a:latin typeface="Courier"/>
+              </a:rPr>
+              <a:t>return</a:t>
+            </a:r>
+            <a:r>
+              <a:rPr>
+                <a:latin typeface="Courier"/>
+              </a:rPr>
+              <a:t> </a:t>
+            </a:r>
+            <a:r>
+              <a:rPr>
+                <a:solidFill>
+                  <a:srgbClr val="666666"/>
+                </a:solidFill>
+                <a:latin typeface="Courier"/>
+              </a:rPr>
+              <a:t>-</a:t>
+            </a:r>
+            <a:r>
+              <a:rPr>
+                <a:solidFill>
+                  <a:srgbClr val="40A070"/>
+                </a:solidFill>
+                <a:latin typeface="Courier"/>
+              </a:rPr>
+              <a:t>1</a:t>
+            </a:r>
+          </a:p>
+        </p:txBody>
+      </p:sp>
+    </p:spTree>
+  </p:cSld>
+</p:sld>
 </file>
 
 <file path=ppt/slides/slide7.xml><?xml version="1.0" encoding="utf-8"?>
@@ -4456,7 +4574,194 @@
             </a:pPr>
             <a:r>
               <a:rPr/>
-              <a:t>Best, worst, and average case</a:t>
+              <a:t>Class 3 — O(n): checking every contact</a:t>
+            </a:r>
+          </a:p>
+        </p:txBody>
+      </p:sp>
+      <p:sp>
+        <p:nvSpPr>
+          <p:cNvPr id="3" name="Content Placeholder 2"/>
+          <p:cNvSpPr>
+            <a:spLocks noGrp="1"/>
+          </p:cNvSpPr>
+          <p:nvPr>
+            <p:ph idx="1"/>
+          </p:nvPr>
+        </p:nvSpPr>
+        <p:spPr/>
+        <p:txBody>
+          <a:bodyPr/>
+          <a:lstStyle/>
+          <a:p>
+            <a:pPr lvl="0" indent="0">
+              <a:buNone/>
+            </a:pPr>
+            <a:r>
+              <a:rPr b="1">
+                <a:solidFill>
+                  <a:srgbClr val="007020"/>
+                </a:solidFill>
+                <a:latin typeface="Courier"/>
+              </a:rPr>
+              <a:t>def</a:t>
+            </a:r>
+            <a:r>
+              <a:rPr>
+                <a:latin typeface="Courier"/>
+              </a:rPr>
+              <a:t> find_linear(contacts, name):</a:t>
+            </a:r>
+            <a:br/>
+            <a:r>
+              <a:rPr>
+                <a:latin typeface="Courier"/>
+              </a:rPr>
+              <a:t>    </a:t>
+            </a:r>
+            <a:r>
+              <a:rPr b="1">
+                <a:solidFill>
+                  <a:srgbClr val="007020"/>
+                </a:solidFill>
+                <a:latin typeface="Courier"/>
+              </a:rPr>
+              <a:t>for</a:t>
+            </a:r>
+            <a:r>
+              <a:rPr>
+                <a:latin typeface="Courier"/>
+              </a:rPr>
+              <a:t> i, c </a:t>
+            </a:r>
+            <a:r>
+              <a:rPr b="1">
+                <a:solidFill>
+                  <a:srgbClr val="007020"/>
+                </a:solidFill>
+                <a:latin typeface="Courier"/>
+              </a:rPr>
+              <a:t>in</a:t>
+            </a:r>
+            <a:r>
+              <a:rPr>
+                <a:latin typeface="Courier"/>
+              </a:rPr>
+              <a:t> </a:t>
+            </a:r>
+            <a:r>
+              <a:rPr>
+                <a:solidFill>
+                  <a:srgbClr val="008000"/>
+                </a:solidFill>
+                <a:latin typeface="Courier"/>
+              </a:rPr>
+              <a:t>enumerate</a:t>
+            </a:r>
+            <a:r>
+              <a:rPr>
+                <a:latin typeface="Courier"/>
+              </a:rPr>
+              <a:t>(contacts):</a:t>
+            </a:r>
+            <a:br/>
+            <a:r>
+              <a:rPr>
+                <a:latin typeface="Courier"/>
+              </a:rPr>
+              <a:t>        </a:t>
+            </a:r>
+            <a:r>
+              <a:rPr b="1">
+                <a:solidFill>
+                  <a:srgbClr val="007020"/>
+                </a:solidFill>
+                <a:latin typeface="Courier"/>
+              </a:rPr>
+              <a:t>if</a:t>
+            </a:r>
+            <a:r>
+              <a:rPr>
+                <a:latin typeface="Courier"/>
+              </a:rPr>
+              <a:t> c </a:t>
+            </a:r>
+            <a:r>
+              <a:rPr>
+                <a:solidFill>
+                  <a:srgbClr val="666666"/>
+                </a:solidFill>
+                <a:latin typeface="Courier"/>
+              </a:rPr>
+              <a:t>==</a:t>
+            </a:r>
+            <a:r>
+              <a:rPr>
+                <a:latin typeface="Courier"/>
+              </a:rPr>
+              <a:t> name:</a:t>
+            </a:r>
+            <a:br/>
+            <a:r>
+              <a:rPr>
+                <a:latin typeface="Courier"/>
+              </a:rPr>
+              <a:t>            </a:t>
+            </a:r>
+            <a:r>
+              <a:rPr b="1">
+                <a:solidFill>
+                  <a:srgbClr val="007020"/>
+                </a:solidFill>
+                <a:latin typeface="Courier"/>
+              </a:rPr>
+              <a:t>return</a:t>
+            </a:r>
+            <a:r>
+              <a:rPr>
+                <a:latin typeface="Courier"/>
+              </a:rPr>
+              <a:t> i</a:t>
+            </a:r>
+            <a:br/>
+            <a:r>
+              <a:rPr>
+                <a:latin typeface="Courier"/>
+              </a:rPr>
+              <a:t>    </a:t>
+            </a:r>
+            <a:r>
+              <a:rPr b="1">
+                <a:solidFill>
+                  <a:srgbClr val="007020"/>
+                </a:solidFill>
+                <a:latin typeface="Courier"/>
+              </a:rPr>
+              <a:t>return</a:t>
+            </a:r>
+            <a:r>
+              <a:rPr>
+                <a:latin typeface="Courier"/>
+              </a:rPr>
+              <a:t> </a:t>
+            </a:r>
+            <a:r>
+              <a:rPr>
+                <a:solidFill>
+                  <a:srgbClr val="666666"/>
+                </a:solidFill>
+                <a:latin typeface="Courier"/>
+              </a:rPr>
+              <a:t>-</a:t>
+            </a:r>
+            <a:r>
+              <a:rPr>
+                <a:solidFill>
+                  <a:srgbClr val="40A070"/>
+                </a:solidFill>
+                <a:latin typeface="Courier"/>
+              </a:rPr>
+              <a:t>1</a:t>
             </a:r>
           </a:p>
         </p:txBody>
@@ -4503,7 +4808,7 @@
             </a:pPr>
             <a:r>
               <a:rPr/>
-              <a:t>Exercise (bring to lab)</a:t>
+              <a:t>Class 4 — O(n log n): sorting the list first</a:t>
             </a:r>
           </a:p>
         </p:txBody>
@@ -4550,7 +4855,313 @@
             </a:pPr>
             <a:r>
               <a:rPr/>
-              <a:t>Where this course goes next</a:t>
+              <a:t>Class 5 — O(n²): comparing every pair</a:t>
+            </a:r>
+          </a:p>
+        </p:txBody>
+      </p:sp>
+      <p:sp>
+        <p:nvSpPr>
+          <p:cNvPr id="3" name="Content Placeholder 2"/>
+          <p:cNvSpPr>
+            <a:spLocks noGrp="1"/>
+          </p:cNvSpPr>
+          <p:nvPr>
+            <p:ph idx="1"/>
+          </p:nvPr>
+        </p:nvSpPr>
+        <p:spPr/>
+        <p:txBody>
+          <a:bodyPr/>
+          <a:lstStyle/>
+          <a:p>
+            <a:pPr lvl="0" indent="0">
+              <a:buNone/>
+            </a:pPr>
+            <a:r>
+              <a:rPr b="1">
+                <a:solidFill>
+                  <a:srgbClr val="007020"/>
+                </a:solidFill>
+                <a:latin typeface="Courier"/>
+              </a:rPr>
+              <a:t>def</a:t>
+            </a:r>
+            <a:r>
+              <a:rPr>
+                <a:latin typeface="Courier"/>
+              </a:rPr>
+              <a:t> has_duplicate_birthday(birthdays):</a:t>
+            </a:r>
+            <a:br/>
+            <a:r>
+              <a:rPr>
+                <a:latin typeface="Courier"/>
+              </a:rPr>
+              <a:t>    n </a:t>
+            </a:r>
+            <a:r>
+              <a:rPr>
+                <a:solidFill>
+                  <a:srgbClr val="666666"/>
+                </a:solidFill>
+                <a:latin typeface="Courier"/>
+              </a:rPr>
+              <a:t>=</a:t>
+            </a:r>
+            <a:r>
+              <a:rPr>
+                <a:latin typeface="Courier"/>
+              </a:rPr>
+              <a:t> </a:t>
+            </a:r>
+            <a:r>
+              <a:rPr>
+                <a:solidFill>
+                  <a:srgbClr val="008000"/>
+                </a:solidFill>
+                <a:latin typeface="Courier"/>
+              </a:rPr>
+              <a:t>len</a:t>
+            </a:r>
+            <a:r>
+              <a:rPr>
+                <a:latin typeface="Courier"/>
+              </a:rPr>
+              <a:t>(birthdays)</a:t>
+            </a:r>
+            <a:br/>
+            <a:r>
+              <a:rPr>
+                <a:latin typeface="Courier"/>
+              </a:rPr>
+              <a:t>    </a:t>
+            </a:r>
+            <a:r>
+              <a:rPr b="1">
+                <a:solidFill>
+                  <a:srgbClr val="007020"/>
+                </a:solidFill>
+                <a:latin typeface="Courier"/>
+              </a:rPr>
+              <a:t>for</a:t>
+            </a:r>
+            <a:r>
+              <a:rPr>
+                <a:latin typeface="Courier"/>
+              </a:rPr>
+              <a:t> i </a:t>
+            </a:r>
+            <a:r>
+              <a:rPr b="1">
+                <a:solidFill>
+                  <a:srgbClr val="007020"/>
+                </a:solidFill>
+                <a:latin typeface="Courier"/>
+              </a:rPr>
+              <a:t>in</a:t>
+            </a:r>
+            <a:r>
+              <a:rPr>
+                <a:latin typeface="Courier"/>
+              </a:rPr>
+              <a:t> </a:t>
+            </a:r>
+            <a:r>
+              <a:rPr>
+                <a:solidFill>
+                  <a:srgbClr val="008000"/>
+                </a:solidFill>
+                <a:latin typeface="Courier"/>
+              </a:rPr>
+              <a:t>range</a:t>
+            </a:r>
+            <a:r>
+              <a:rPr>
+                <a:latin typeface="Courier"/>
+              </a:rPr>
+              <a:t>(n):</a:t>
+            </a:r>
+            <a:br/>
+            <a:r>
+              <a:rPr>
+                <a:latin typeface="Courier"/>
+              </a:rPr>
+              <a:t>        </a:t>
+            </a:r>
+            <a:r>
+              <a:rPr b="1">
+                <a:solidFill>
+                  <a:srgbClr val="007020"/>
+                </a:solidFill>
+                <a:latin typeface="Courier"/>
+              </a:rPr>
+              <a:t>for</a:t>
+            </a:r>
+            <a:r>
+              <a:rPr>
+                <a:latin typeface="Courier"/>
+              </a:rPr>
+              <a:t> j </a:t>
+            </a:r>
+            <a:r>
+              <a:rPr b="1">
+                <a:solidFill>
+                  <a:srgbClr val="007020"/>
+                </a:solidFill>
+                <a:latin typeface="Courier"/>
+              </a:rPr>
+              <a:t>in</a:t>
+            </a:r>
+            <a:r>
+              <a:rPr>
+                <a:latin typeface="Courier"/>
+              </a:rPr>
+              <a:t> </a:t>
+            </a:r>
+            <a:r>
+              <a:rPr>
+                <a:solidFill>
+                  <a:srgbClr val="008000"/>
+                </a:solidFill>
+                <a:latin typeface="Courier"/>
+              </a:rPr>
+              <a:t>range</a:t>
+            </a:r>
+            <a:r>
+              <a:rPr>
+                <a:latin typeface="Courier"/>
+              </a:rPr>
+              <a:t>(i </a:t>
+            </a:r>
+            <a:r>
+              <a:rPr>
+                <a:solidFill>
+                  <a:srgbClr val="666666"/>
+                </a:solidFill>
+                <a:latin typeface="Courier"/>
+              </a:rPr>
+              <a:t>+</a:t>
+            </a:r>
+            <a:r>
+              <a:rPr>
+                <a:latin typeface="Courier"/>
+              </a:rPr>
+              <a:t> </a:t>
+            </a:r>
+            <a:r>
+              <a:rPr>
+                <a:solidFill>
+                  <a:srgbClr val="40A070"/>
+                </a:solidFill>
+                <a:latin typeface="Courier"/>
+              </a:rPr>
+              <a:t>1</a:t>
+            </a:r>
+            <a:r>
+              <a:rPr>
+                <a:latin typeface="Courier"/>
+              </a:rPr>
+              <a:t>, n):</a:t>
+            </a:r>
+            <a:br/>
+            <a:r>
+              <a:rPr>
+                <a:latin typeface="Courier"/>
+              </a:rPr>
+              <a:t>            </a:t>
+            </a:r>
+            <a:r>
+              <a:rPr b="1">
+                <a:solidFill>
+                  <a:srgbClr val="007020"/>
+                </a:solidFill>
+                <a:latin typeface="Courier"/>
+              </a:rPr>
+              <a:t>if</a:t>
+            </a:r>
+            <a:r>
+              <a:rPr>
+                <a:latin typeface="Courier"/>
+              </a:rPr>
+              <a:t> birthdays[i] </a:t>
+            </a:r>
+            <a:r>
+              <a:rPr>
+                <a:solidFill>
+                  <a:srgbClr val="666666"/>
+                </a:solidFill>
+                <a:latin typeface="Courier"/>
+              </a:rPr>
+              <a:t>==</a:t>
+            </a:r>
+            <a:r>
+              <a:rPr>
+                <a:latin typeface="Courier"/>
+              </a:rPr>
+              <a:t> birthdays[j]:</a:t>
+            </a:r>
+            <a:br/>
+            <a:r>
+              <a:rPr>
+                <a:latin typeface="Courier"/>
+              </a:rPr>
+              <a:t>                </a:t>
+            </a:r>
+            <a:r>
+              <a:rPr b="1">
+                <a:solidFill>
+                  <a:srgbClr val="007020"/>
+                </a:solidFill>
+                <a:latin typeface="Courier"/>
+              </a:rPr>
+              <a:t>return</a:t>
+            </a:r>
+            <a:r>
+              <a:rPr>
+                <a:latin typeface="Courier"/>
+              </a:rPr>
+              <a:t> </a:t>
+            </a:r>
+            <a:r>
+              <a:rPr>
+                <a:solidFill>
+                  <a:srgbClr val="19177C"/>
+                </a:solidFill>
+                <a:latin typeface="Courier"/>
+              </a:rPr>
+              <a:t>True</a:t>
+            </a:r>
+            <a:br/>
+            <a:r>
+              <a:rPr>
+                <a:latin typeface="Courier"/>
+              </a:rPr>
+              <a:t>    </a:t>
+            </a:r>
+            <a:r>
+              <a:rPr b="1">
+                <a:solidFill>
+                  <a:srgbClr val="007020"/>
+                </a:solidFill>
+                <a:latin typeface="Courier"/>
+              </a:rPr>
+              <a:t>return</a:t>
+            </a:r>
+            <a:r>
+              <a:rPr>
+                <a:latin typeface="Courier"/>
+              </a:rPr>
+              <a:t> </a:t>
+            </a:r>
+            <a:r>
+              <a:rPr>
+                <a:solidFill>
+                  <a:srgbClr val="19177C"/>
+                </a:solidFill>
+                <a:latin typeface="Courier"/>
+              </a:rPr>
+              <a:t>False</a:t>
             </a:r>
           </a:p>
         </p:txBody>
